--- a/presentation/MidTerm_Postmortem_FINAL_PLAN.pptx
+++ b/presentation/MidTerm_Postmortem_FINAL_PLAN.pptx
@@ -910,7 +910,7 @@
           <a:lstStyle/>
           <a:p>
             <a:r>
-              <a:t>Open with the headline number and frame the talk. We submitted the locked multi-K system to the ComParE 2017 URTIC Cold leaderboard; it scored UAR 0.6205 -- well below our shadow-mean. The next three minutes are about WHY, and what we change for the end-of-semester second submission.</a:t>
+              <a:t>We submitted our system to the ComParE 2017 Cold task. It scored UAR 0.62 on the hidden test, below what our own validation predicted. I will cover what we used, what went wrong, why, and what we change next.</a:t>
             </a:r>
           </a:p>
         </p:txBody>
@@ -980,7 +980,7 @@
           <a:lstStyle/>
           <a:p>
             <a:r>
-              <a:t>Hidden-test confusion matrix. We called COLD on 4124 out of 9551 utterances -- 43.2 percent. The true rate is 9.4 percent. UAR landed at 0.6205. Our internal validation -- the shadow-mean over ten alternative speaker-disjoint partitions -- was 0.6940 plus minus 0.0157. So we are about five times our own uncertainty estimate below where we expected to be. We audited the pipeline five ways: checkpoints, betas, features, threshold derivation, submission CSV -- all bit-faithful. So this isn't a bug. The question for the next two minutes: what kind of failure is this?</a:t>
+              <a:t>We rebuilt the 2017 late fusion with a modern backbone. Frozen WavLM with audit-weighted pooling, two handcrafted groups fused on top, five seeds averaged, one threshold tuned on a dev split. On that split we matched the published baseline.</a:t>
             </a:r>
           </a:p>
         </p:txBody>
@@ -1050,7 +1050,7 @@
           <a:lstStyle/>
           <a:p>
             <a:r>
-              <a:t>Here is the test multi-K ensemble logit distribution. The red dashed line is where we locked tau -- minus 1.625, tuned on one 10 percent stratified-grouped train holdout. The green line is where tau would need to be to make our predicted cold-rate match the published 9.4 percent prior: PLUS 7.09. That's a gap of 8.7 logit units. The model still ranks cold above non-cold -- UAR is above chance -- but the operating point is in the wrong place by close to an order of magnitude. The ranker survived; the threshold did not.</a:t>
+              <a:t>On the hidden test we got 0.62. Our own validation said 0.69, and the result sits below every dev fold we measured. Precision on cold is 14 percent. We checked the run five ways and it is byte for byte correct, so this is not a bug. It is a generalization gap.</a:t>
             </a:r>
           </a:p>
         </p:txBody>
@@ -1120,7 +1120,7 @@
           <a:lstStyle/>
           <a:p>
             <a:r>
-              <a:t>This is the system we shipped. Frozen WavLM-Large, audit-derived layer-weighted A2.5 head trained with 5 seeds, K1 and K2 late fusion with the gain-invariant G4 and the modulation-spectrogram G5 handcrafted feature groups, 5-seed mean-logit ensemble, and finally tau equal to minus 1.625. Everything to the LEFT of the threshold box is shadow-validated and byte-identical to the paper headline. Everything FAILS at that final red box. The threshold was tuned on a single 10-percent train holdout and on hidden test the logits sit shifted, producing a 34-percentage-point over-prediction of cold.</a:t>
+              <a:t>The easy story is that we call cold too often. But at our threshold the cold-call rate is about 42 percent on dev too, so the rate is matched. Hold it matched and look at recall: on test it is below every dev fold, on both classes. At a fixed call rate that is a ranking loss, and no threshold change fixes a ranking loss.</a:t>
             </a:r>
           </a:p>
         </p:txBody>
@@ -1190,7 +1190,7 @@
           <a:lstStyle/>
           <a:p>
             <a:r>
-              <a:t>Five candidate failure modes, ranked by posterior probability after an adversarial critic forced us to de-conflate them. Calibration / scale drift sits at 0.42 -- the operating-point story you just saw. Speaker confound at 0.24, because our negative-control set already showed that representation-level speaker debiasing fails under the frozen-backbone constraint. Feature-distribution shift at 0.22, credible but we have never actually measured it on disk. The bottom two -- single-split tau variance and ensemble degradation -- are essentially noise: the shadow-sigma is too small and the shadow protocol itself already ensembles robustly.</a:t>
+              <a:t>Our folds are speaker-disjoint, but they all come from one speaker pool. The hidden test is a different population. The cold direction we learned leans on speaker traits from our pool and transfers worse. Folds drawn from the same pool cannot measure that gap.</a:t>
             </a:r>
           </a:p>
         </p:txBody>
@@ -1260,7 +1260,7 @@
           <a:lstStyle/>
           <a:p>
             <a:r>
-              <a:t>Our second submission. The locked pipeline stays byte-identical -- same WavLM, same A2.5 head, same betas, same checkpoints. What we replace is the final block: a single tau becomes SCOP. Move one: a Bayes prior-correction toward the published 9.4 percent cold prior. That's a CONSTANT, not a tuned hyperparameter. Move two: a calibrator -- Platt, isotonic, or quantile-match -- fit on ten speaker-disjoint shadow folds, selected by leave-one-partition-out with a stability gate. The acceptance rule is pre-registered in shadow units only: mean shadow UAR lift at least plus 0.015, and no fold loses more than 0.005. The hidden-test labels we now have are used ONLY for the post-mortem confusion matrix you saw on slide 2 -- never to choose tau or the calibrator family.</a:t>
+              <a:t>We ruled out the cheap fixes by measurement. Two real options. One, report this as the ceiling of a frozen backbone, which our protocol already flagged. Two, unfreeze the top layers and train with speaker-stratified batches so the cold cue depends less on who is talking. We pick on the dev folds first.</a:t>
             </a:r>
           </a:p>
         </p:txBody>
@@ -1330,7 +1330,7 @@
           <a:lstStyle/>
           <a:p>
             <a:r>
-              <a:t>To close. We've split what looked like one big calibration-drift mode into four shadow-testable sub-modes. SCOP attacks the dominant one with a single new degree of freedom. The frozen backbone and locked betas mean the paper's M1 through M19 ablations stand untouched. A label-free feature-shift audit -- TTA-Z -- runs in parallel as a hedge. The lesson is the framing: once a five-check audit rules out bugs, the failure signature itself becomes the diagnosis. Questions.</a:t>
+              <a:t>References for the baseline, the backbone, the frozen-representation paradigm, and the speaker-confound point.</a:t>
             </a:r>
           </a:p>
         </p:txBody>
@@ -12183,12 +12183,12 @@
           <a:lstStyle/>
           <a:p>
             <a:r>
-              <a:rPr sz="3000" b="1">
+              <a:rPr sz="2400" b="1">
                 <a:solidFill>
                   <a:srgbClr val="003359"/>
                 </a:solidFill>
               </a:rPr>
-              <a:t>Cold Detection on URTIC</a:t>
+              <a:t>URTIC Cold Detection: mid-term result and plan</a:t>
             </a:r>
           </a:p>
         </p:txBody>
@@ -12209,12 +12209,12 @@
           <a:lstStyle/>
           <a:p>
             <a:r>
-              <a:rPr sz="1600">
+              <a:rPr sz="1500">
                 <a:solidFill>
                   <a:srgbClr val="3C3C3C"/>
                 </a:solidFill>
               </a:rPr>
-              <a:t>Mid-term result &amp; plan for the final submission</a:t>
+              <a:t>Christoph Feldkircher, ___ Lee, ___ Chouksey</a:t>
             </a:r>
           </a:p>
           <a:p>
@@ -12234,7 +12234,7 @@
                   <a:srgbClr val="3C3C3C"/>
                 </a:solidFill>
               </a:rPr>
-              <a:t>Christoph Feldkircher  |  Tony Lee  |  Sai Sashank Chouksey</a:t>
+              <a:t>ML4Health SS26, Technical University of Munich</a:t>
             </a:r>
           </a:p>
           <a:p>
@@ -12244,17 +12244,7 @@
                   <a:srgbClr val="3C3C3C"/>
                 </a:solidFill>
               </a:rPr>
-              <a:t>Technical University of Munich  --  Human-Like Understanding (HLU) 2026</a:t>
-            </a:r>
-          </a:p>
-          <a:p>
-            <a:r>
-              <a:rPr sz="1300">
-                <a:solidFill>
-                  <a:srgbClr val="3C3C3C"/>
-                </a:solidFill>
-              </a:rPr>
-              <a:t>Munich, 16 June 2026</a:t>
+              <a:t>June 2026</a:t>
             </a:r>
           </a:p>
         </p:txBody>
@@ -12268,7 +12258,7 @@
         <p:spPr>
           <a:xfrm>
             <a:off x="310896" y="4855464"/>
-            <a:ext cx="7772400" cy="274320"/>
+            <a:ext cx="7863840" cy="274320"/>
           </a:xfrm>
           <a:prstGeom prst="rect">
             <a:avLst/>
@@ -12281,7 +12271,7 @@
           </a:ln>
         </p:spPr>
         <p:txBody>
-          <a:bodyPr wrap="square" lIns="0" rIns="0" tIns="0" bIns="0">
+          <a:bodyPr wrap="none" lIns="0" rIns="0" tIns="0" bIns="0">
             <a:spAutoFit/>
           </a:bodyPr>
           <a:lstStyle/>
@@ -12292,7 +12282,7 @@
                   <a:srgbClr val="6E6E6E"/>
                 </a:solidFill>
               </a:rPr>
-              <a:t>Christoph Feldkircher, Tony Lee, Sai Sashank Chouksey  |  TUM HLU 2026  |  Cold Detection on URTIC</a:t>
+              <a:t>Feldkircher, Lee, Chouksey  |  ML4Health SS26, TUM  |  URTIC Cold Detection</a:t>
             </a:r>
           </a:p>
         </p:txBody>
@@ -12353,14 +12343,14 @@
                   <a:srgbClr val="000000"/>
                 </a:solidFill>
               </a:rPr>
-              <a:t>Hidden-test result: we predict cold 4x too often</a:t>
+              <a:t>What we used</a:t>
             </a:r>
           </a:p>
         </p:txBody>
       </p:sp>
       <p:pic>
         <p:nvPicPr>
-          <p:cNvPr id="5" name="Picture 4" descr="fig1_confusion_matrix.png"/>
+          <p:cNvPr id="5" name="Picture 4" descr="fig6_architecture.png"/>
           <p:cNvPicPr>
             <a:picLocks noChangeAspect="1"/>
           </p:cNvPicPr>
@@ -12374,8 +12364,8 @@
         </p:blipFill>
         <p:spPr>
           <a:xfrm>
-            <a:off x="1333424" y="868680"/>
-            <a:ext cx="6477151" cy="3840480"/>
+            <a:off x="228600" y="960120"/>
+            <a:ext cx="8686800" cy="2530267"/>
           </a:xfrm>
           <a:prstGeom prst="rect">
             <a:avLst/>
@@ -12391,7 +12381,7 @@
         <p:spPr>
           <a:xfrm>
             <a:off x="310896" y="4855464"/>
-            <a:ext cx="7772400" cy="274320"/>
+            <a:ext cx="7863840" cy="274320"/>
           </a:xfrm>
           <a:prstGeom prst="rect">
             <a:avLst/>
@@ -12404,7 +12394,7 @@
           </a:ln>
         </p:spPr>
         <p:txBody>
-          <a:bodyPr wrap="square" lIns="0" rIns="0" tIns="0" bIns="0">
+          <a:bodyPr wrap="none" lIns="0" rIns="0" tIns="0" bIns="0">
             <a:spAutoFit/>
           </a:bodyPr>
           <a:lstStyle/>
@@ -12415,7 +12405,7 @@
                   <a:srgbClr val="6E6E6E"/>
                 </a:solidFill>
               </a:rPr>
-              <a:t>Christoph Feldkircher, Tony Lee, Sai Sashank Chouksey  |  TUM HLU 2026  |  Cold Detection on URTIC</a:t>
+              <a:t>Feldkircher, Lee, Chouksey  |  ML4Health SS26, TUM  |  URTIC Cold Detection</a:t>
             </a:r>
           </a:p>
         </p:txBody>
@@ -12476,14 +12466,14 @@
                   <a:srgbClr val="000000"/>
                 </a:solidFill>
               </a:rPr>
-              <a:t>The ranker survived; the threshold did not</a:t>
+              <a:t>What went wrong</a:t>
             </a:r>
           </a:p>
         </p:txBody>
       </p:sp>
       <p:pic>
         <p:nvPicPr>
-          <p:cNvPr id="5" name="Picture 4" descr="fig2_logit_shift.png"/>
+          <p:cNvPr id="5" name="Picture 4" descr="fig1_confusion_matrix.png"/>
           <p:cNvPicPr>
             <a:picLocks noChangeAspect="1"/>
           </p:cNvPicPr>
@@ -12497,8 +12487,8 @@
         </p:blipFill>
         <p:spPr>
           <a:xfrm>
-            <a:off x="441768" y="868680"/>
-            <a:ext cx="8260463" cy="3840480"/>
+            <a:off x="1303987" y="960120"/>
+            <a:ext cx="6536025" cy="3703320"/>
           </a:xfrm>
           <a:prstGeom prst="rect">
             <a:avLst/>
@@ -12514,7 +12504,7 @@
         <p:spPr>
           <a:xfrm>
             <a:off x="310896" y="4855464"/>
-            <a:ext cx="7772400" cy="274320"/>
+            <a:ext cx="7863840" cy="274320"/>
           </a:xfrm>
           <a:prstGeom prst="rect">
             <a:avLst/>
@@ -12527,7 +12517,7 @@
           </a:ln>
         </p:spPr>
         <p:txBody>
-          <a:bodyPr wrap="square" lIns="0" rIns="0" tIns="0" bIns="0">
+          <a:bodyPr wrap="none" lIns="0" rIns="0" tIns="0" bIns="0">
             <a:spAutoFit/>
           </a:bodyPr>
           <a:lstStyle/>
@@ -12538,7 +12528,7 @@
                   <a:srgbClr val="6E6E6E"/>
                 </a:solidFill>
               </a:rPr>
-              <a:t>Christoph Feldkircher, Tony Lee, Sai Sashank Chouksey  |  TUM HLU 2026  |  Cold Detection on URTIC</a:t>
+              <a:t>Feldkircher, Lee, Chouksey  |  ML4Health SS26, TUM  |  URTIC Cold Detection</a:t>
             </a:r>
           </a:p>
         </p:txBody>
@@ -12599,14 +12589,14 @@
                   <a:srgbClr val="000000"/>
                 </a:solidFill>
               </a:rPr>
-              <a:t>What we used  --  the locked multi-K pipeline</a:t>
+              <a:t>The problem is the ranking, not the threshold</a:t>
             </a:r>
           </a:p>
         </p:txBody>
       </p:sp>
       <p:pic>
         <p:nvPicPr>
-          <p:cNvPr id="5" name="Picture 4" descr="fig6_current_architecture.png"/>
+          <p:cNvPr id="5" name="Picture 4" descr="fig8_recall_below_shadow.png"/>
           <p:cNvPicPr>
             <a:picLocks noChangeAspect="1"/>
           </p:cNvPicPr>
@@ -12620,8 +12610,8 @@
         </p:blipFill>
         <p:spPr>
           <a:xfrm>
-            <a:off x="466871" y="868680"/>
-            <a:ext cx="8210256" cy="3840480"/>
+            <a:off x="922828" y="960120"/>
+            <a:ext cx="7298342" cy="3703320"/>
           </a:xfrm>
           <a:prstGeom prst="rect">
             <a:avLst/>
@@ -12637,7 +12627,7 @@
         <p:spPr>
           <a:xfrm>
             <a:off x="310896" y="4855464"/>
-            <a:ext cx="7772400" cy="274320"/>
+            <a:ext cx="7863840" cy="274320"/>
           </a:xfrm>
           <a:prstGeom prst="rect">
             <a:avLst/>
@@ -12650,7 +12640,7 @@
           </a:ln>
         </p:spPr>
         <p:txBody>
-          <a:bodyPr wrap="square" lIns="0" rIns="0" tIns="0" bIns="0">
+          <a:bodyPr wrap="none" lIns="0" rIns="0" tIns="0" bIns="0">
             <a:spAutoFit/>
           </a:bodyPr>
           <a:lstStyle/>
@@ -12661,7 +12651,7 @@
                   <a:srgbClr val="6E6E6E"/>
                 </a:solidFill>
               </a:rPr>
-              <a:t>Christoph Feldkircher, Tony Lee, Sai Sashank Chouksey  |  TUM HLU 2026  |  Cold Detection on URTIC</a:t>
+              <a:t>Feldkircher, Lee, Chouksey  |  ML4Health SS26, TUM  |  URTIC Cold Detection</a:t>
             </a:r>
           </a:p>
         </p:txBody>
@@ -12722,14 +12712,14 @@
                   <a:srgbClr val="000000"/>
                 </a:solidFill>
               </a:rPr>
-              <a:t>Failure-mode ranking after adversarial critic pass</a:t>
+              <a:t>Why our dev folds did not catch it</a:t>
             </a:r>
           </a:p>
         </p:txBody>
       </p:sp>
       <p:pic>
         <p:nvPicPr>
-          <p:cNvPr id="5" name="Picture 4" descr="fig4_failure_modes.png"/>
+          <p:cNvPr id="5" name="Picture 4" descr="fig10_pool_shift.png"/>
           <p:cNvPicPr>
             <a:picLocks noChangeAspect="1"/>
           </p:cNvPicPr>
@@ -12743,8 +12733,8 @@
         </p:blipFill>
         <p:spPr>
           <a:xfrm>
-            <a:off x="182880" y="868680"/>
-            <a:ext cx="8778240" cy="3749377"/>
+            <a:off x="228600" y="960120"/>
+            <a:ext cx="8686800" cy="3184181"/>
           </a:xfrm>
           <a:prstGeom prst="rect">
             <a:avLst/>
@@ -12760,7 +12750,7 @@
         <p:spPr>
           <a:xfrm>
             <a:off x="310896" y="4855464"/>
-            <a:ext cx="7772400" cy="274320"/>
+            <a:ext cx="7863840" cy="274320"/>
           </a:xfrm>
           <a:prstGeom prst="rect">
             <a:avLst/>
@@ -12773,7 +12763,7 @@
           </a:ln>
         </p:spPr>
         <p:txBody>
-          <a:bodyPr wrap="square" lIns="0" rIns="0" tIns="0" bIns="0">
+          <a:bodyPr wrap="none" lIns="0" rIns="0" tIns="0" bIns="0">
             <a:spAutoFit/>
           </a:bodyPr>
           <a:lstStyle/>
@@ -12784,7 +12774,7 @@
                   <a:srgbClr val="6E6E6E"/>
                 </a:solidFill>
               </a:rPr>
-              <a:t>Christoph Feldkircher, Tony Lee, Sai Sashank Chouksey  |  TUM HLU 2026  |  Cold Detection on URTIC</a:t>
+              <a:t>Feldkircher, Lee, Chouksey  |  ML4Health SS26, TUM  |  URTIC Cold Detection</a:t>
             </a:r>
           </a:p>
         </p:txBody>
@@ -12845,14 +12835,14 @@
                   <a:srgbClr val="000000"/>
                 </a:solidFill>
               </a:rPr>
-              <a:t>What we change  --  Shadow-Calibrated Operating Point (SCOP)</a:t>
+              <a:t>What we change next</a:t>
             </a:r>
           </a:p>
         </p:txBody>
       </p:sp>
       <p:pic>
         <p:nvPicPr>
-          <p:cNvPr id="5" name="Picture 4" descr="fig7_scop_architecture.png"/>
+          <p:cNvPr id="5" name="Picture 4" descr="fig9_what_we_change.png"/>
           <p:cNvPicPr>
             <a:picLocks noChangeAspect="1"/>
           </p:cNvPicPr>
@@ -12866,8 +12856,8 @@
         </p:blipFill>
         <p:spPr>
           <a:xfrm>
-            <a:off x="466871" y="868680"/>
-            <a:ext cx="8210256" cy="3840480"/>
+            <a:off x="228600" y="960120"/>
+            <a:ext cx="8686800" cy="3336744"/>
           </a:xfrm>
           <a:prstGeom prst="rect">
             <a:avLst/>
@@ -12883,7 +12873,7 @@
         <p:spPr>
           <a:xfrm>
             <a:off x="310896" y="4855464"/>
-            <a:ext cx="7772400" cy="274320"/>
+            <a:ext cx="7863840" cy="274320"/>
           </a:xfrm>
           <a:prstGeom prst="rect">
             <a:avLst/>
@@ -12896,7 +12886,7 @@
           </a:ln>
         </p:spPr>
         <p:txBody>
-          <a:bodyPr wrap="square" lIns="0" rIns="0" tIns="0" bIns="0">
+          <a:bodyPr wrap="none" lIns="0" rIns="0" tIns="0" bIns="0">
             <a:spAutoFit/>
           </a:bodyPr>
           <a:lstStyle/>
@@ -12907,7 +12897,7 @@
                   <a:srgbClr val="6E6E6E"/>
                 </a:solidFill>
               </a:rPr>
-              <a:t>Christoph Feldkircher, Tony Lee, Sai Sashank Chouksey  |  TUM HLU 2026  |  Cold Detection on URTIC</a:t>
+              <a:t>Feldkircher, Lee, Chouksey  |  ML4Health SS26, TUM  |  URTIC Cold Detection</a:t>
             </a:r>
           </a:p>
         </p:txBody>
@@ -12947,56 +12937,45 @@
           <a:p>
             <a:pPr/>
             <a:r>
-              <a:rPr sz="1600">
+              <a:rPr sz="1300">
                 <a:solidFill>
-                  <a:srgbClr val="000000"/>
+                  <a:srgbClr val="141414"/>
                 </a:solidFill>
               </a:rPr>
-              <a:t>SCOP attacks the dominant operating-point failure with one degree of freedom</a:t>
+              <a:t>Schuller et al. The INTERSPEECH 2017 Computational Paralinguistics Challenge: Addressee, Cold and Snoring. Interspeech 2017.</a:t>
             </a:r>
           </a:p>
           <a:p>
             <a:pPr/>
             <a:r>
-              <a:rPr sz="1600">
+              <a:rPr sz="1300">
                 <a:solidFill>
-                  <a:srgbClr val="000000"/>
+                  <a:srgbClr val="141414"/>
                 </a:solidFill>
               </a:rPr>
-              <a:t>Frozen backbone, locked betas -- paper headline byte-identical</a:t>
+              <a:t>Chen et al. WavLM: Large-Scale Self-Supervised Pre-Training for Full Stack Speech Processing. IEEE JSTSP, 2022.</a:t>
             </a:r>
           </a:p>
           <a:p>
             <a:pPr/>
             <a:r>
-              <a:rPr sz="1600">
+              <a:rPr sz="1300">
                 <a:solidFill>
-                  <a:srgbClr val="000000"/>
+                  <a:srgbClr val="141414"/>
                 </a:solidFill>
               </a:rPr>
-              <a:t>Pre-registered shadow gate: mean lift &gt;= +0.015, no fold loses &gt; 0.005</a:t>
+              <a:t>Yang et al. SUPERB: Speech processing Universal PERformance Benchmark. Interspeech 2021.</a:t>
             </a:r>
           </a:p>
           <a:p>
             <a:pPr/>
             <a:r>
-              <a:rPr sz="1600">
+              <a:rPr sz="1300">
                 <a:solidFill>
-                  <a:srgbClr val="000000"/>
+                  <a:srgbClr val="141414"/>
                 </a:solidFill>
               </a:rPr>
-              <a:t>Label-free TTA-Z runs in parallel as a feature-shift hedge</a:t>
-            </a:r>
-          </a:p>
-          <a:p>
-            <a:pPr/>
-            <a:r>
-              <a:rPr sz="1600">
-                <a:solidFill>
-                  <a:srgbClr val="000000"/>
-                </a:solidFill>
-              </a:rPr>
-              <a:t>Cost: ~15 days; risk: medium-low; fallback to submission_1 is built in</a:t>
+              <a:t>Coppock, Jones, Kiskin, Schuller. COVID-19 detection from audio: seven grains of salt. Lancet Digital Health, 2021.</a:t>
             </a:r>
           </a:p>
         </p:txBody>
@@ -13022,7 +13001,7 @@
                   <a:srgbClr val="000000"/>
                 </a:solidFill>
               </a:rPr>
-              <a:t>Audit-and-recalibrate, not retrain</a:t>
+              <a:t>References</a:t>
             </a:r>
           </a:p>
         </p:txBody>
@@ -13036,7 +13015,7 @@
         <p:spPr>
           <a:xfrm>
             <a:off x="310896" y="4855464"/>
-            <a:ext cx="7772400" cy="274320"/>
+            <a:ext cx="7863840" cy="274320"/>
           </a:xfrm>
           <a:prstGeom prst="rect">
             <a:avLst/>
@@ -13049,7 +13028,7 @@
           </a:ln>
         </p:spPr>
         <p:txBody>
-          <a:bodyPr wrap="square" lIns="0" rIns="0" tIns="0" bIns="0">
+          <a:bodyPr wrap="none" lIns="0" rIns="0" tIns="0" bIns="0">
             <a:spAutoFit/>
           </a:bodyPr>
           <a:lstStyle/>
@@ -13060,7 +13039,7 @@
                   <a:srgbClr val="6E6E6E"/>
                 </a:solidFill>
               </a:rPr>
-              <a:t>Christoph Feldkircher, Tony Lee, Sai Sashank Chouksey  |  TUM HLU 2026  |  Cold Detection on URTIC</a:t>
+              <a:t>Feldkircher, Lee, Chouksey  |  ML4Health SS26, TUM  |  URTIC Cold Detection</a:t>
             </a:r>
           </a:p>
         </p:txBody>
